--- a/downloads/creative-portfolio.pptx
+++ b/downloads/creative-portfolio.pptx
@@ -8,6 +8,7 @@
     <p:sldId id="256" r:id="rId2"/>
     <p:sldId id="257" r:id="rId3"/>
     <p:sldId id="258" r:id="rId4"/>
+    <p:sldId id="261" r:id="rId12"/>
     <p:sldId id="259" r:id="rId5"/>
     <p:sldId id="260" r:id="rId6"/>
   </p:sldIdLst>
@@ -1339,7 +1340,7 @@
                   <a:srgbClr val="999999"/>
                 </a:solidFill>
               </a:rPr>
-              <a:t>פורטפוליו יצירתי — ניתנת להתאמה מלאה</a:t>
+              <a:t>תבנית פורטפוליו יצירתי — ניתנת להתאמה מלאה</a:t>
             </a:r>
             <a:endParaRPr lang="en-US" sz="1200" dirty="0"/>
           </a:p>
@@ -1542,7 +1543,7 @@
         <p:spPr>
           <a:xfrm>
             <a:off x="640080" y="457200"/>
-            <a:ext cx="7315200" cy="731520"/>
+            <a:ext cx="10908792" cy="731520"/>
           </a:xfrm>
           <a:prstGeom prst="rect">
             <a:avLst/>
@@ -1574,13 +1575,13 @@
       </p:sp>
       <p:sp>
         <p:nvSpPr>
-          <p:cNvPr id="3" name="Shape 1"/>
+          <p:cNvPr id="7" name="Shape 5"/>
           <p:cNvSpPr/>
           <p:nvPr/>
         </p:nvSpPr>
         <p:spPr>
           <a:xfrm>
-            <a:off x="790956" y="1737360"/>
+            <a:off x="8106156" y="1737360"/>
             <a:ext cx="3291840" cy="2377440"/>
           </a:xfrm>
           <a:prstGeom prst="roundRect">
@@ -1596,13 +1597,13 @@
       </p:sp>
       <p:sp>
         <p:nvSpPr>
-          <p:cNvPr id="4" name="Text 2"/>
+          <p:cNvPr id="8" name="Text 6"/>
           <p:cNvSpPr/>
           <p:nvPr/>
         </p:nvSpPr>
         <p:spPr>
           <a:xfrm>
-            <a:off x="790956" y="4206240"/>
+            <a:off x="8106156" y="4206240"/>
             <a:ext cx="3291840" cy="365760"/>
           </a:xfrm>
           <a:prstGeom prst="rect">
@@ -1696,13 +1697,13 @@
       </p:sp>
       <p:sp>
         <p:nvSpPr>
-          <p:cNvPr id="7" name="Shape 5"/>
+          <p:cNvPr id="3" name="Shape 1"/>
           <p:cNvSpPr/>
           <p:nvPr/>
         </p:nvSpPr>
         <p:spPr>
           <a:xfrm>
-            <a:off x="8106156" y="1737360"/>
+            <a:off x="790956" y="1737360"/>
             <a:ext cx="3291840" cy="2377440"/>
           </a:xfrm>
           <a:prstGeom prst="roundRect">
@@ -1718,13 +1719,13 @@
       </p:sp>
       <p:sp>
         <p:nvSpPr>
-          <p:cNvPr id="8" name="Text 6"/>
+          <p:cNvPr id="4" name="Text 2"/>
           <p:cNvSpPr/>
           <p:nvPr/>
         </p:nvSpPr>
         <p:spPr>
           <a:xfrm>
-            <a:off x="8106156" y="4206240"/>
+            <a:off x="790956" y="4206240"/>
             <a:ext cx="3291840" cy="365760"/>
           </a:xfrm>
           <a:prstGeom prst="rect">
@@ -1844,7 +1845,7 @@
                 <a:ea typeface="Calibri" pitchFamily="34" charset="-122"/>
                 <a:cs typeface="Calibri" pitchFamily="34" charset="-120"/>
               </a:rPr>
-              <a:t>"עבודה יוצאת דופן, יצירתית ומדויקת. חוויה מעולה מתחילה ועד סוף."</a:t>
+              <a:t>"עבודה יוצאת דופן, יצירתית ומדויקת. חוויה מעולה מההתחלה ועד הסוף."</a:t>
             </a:r>
             <a:endParaRPr lang="en-US" sz="2000" dirty="0"/>
           </a:p>
@@ -1993,7 +1994,7 @@
                 <a:ea typeface="Calibri" pitchFamily="34" charset="-122"/>
                 <a:cs typeface="Calibri" pitchFamily="34" charset="-120"/>
               </a:rPr>
-              <a:t>זמינה לפרויקטים חדשים</a:t>
+              <a:t>פתוחים לפרויקטים חדשים — נשמח לשמוע מכם</a:t>
             </a:r>
             <a:endParaRPr lang="en-US" sz="1400" dirty="0"/>
           </a:p>
@@ -2120,6 +2121,428 @@
                 <a:cs typeface="Calibri" pitchFamily="34" charset="-120"/>
               </a:rPr>
               <a:t>www.yourname.com</a:t>
+            </a:r>
+            <a:endParaRPr lang="en-US" sz="1300" dirty="0"/>
+          </a:p>
+        </p:txBody>
+      </p:sp>
+    </p:spTree>
+  </p:cSld>
+  <p:clrMapOvr>
+    <a:masterClrMapping/>
+  </p:clrMapOvr>
+</p:sld>
+</file>
+
+<file path=ppt/slides/slide6.xml><?xml version="1.0" encoding="utf-8"?>
+<p:sld xmlns:a="http://schemas.openxmlformats.org/drawingml/2006/main" xmlns:p="http://schemas.openxmlformats.org/presentationml/2006/main" xmlns:r="http://schemas.openxmlformats.org/officeDocument/2006/relationships">
+  <p:cSld>
+    <p:bg>
+      <p:bgPr>
+        <a:solidFill>
+          <a:srgbClr val="FFFFFF"/>
+        </a:solidFill>
+      </p:bgPr>
+    </p:bg>
+    <p:spTree>
+      <p:nvGrpSpPr>
+        <p:cNvPr id="2" name=""/>
+        <p:cNvGrpSpPr/>
+        <p:nvPr/>
+      </p:nvGrpSpPr>
+      <p:grpSpPr/>
+      <p:sp>
+        <p:nvSpPr>
+          <p:cNvPr id="3" name="Text 0"/>
+          <p:cNvSpPr/>
+          <p:nvPr/>
+        </p:nvSpPr>
+        <p:spPr>
+          <a:xfrm>
+            <a:off x="6309360" y="548640"/>
+            <a:ext cx="5239512" cy="731520"/>
+          </a:xfrm>
+          <a:prstGeom prst="rect">
+            <a:avLst/>
+          </a:prstGeom>
+          <a:noFill/>
+          <a:ln/>
+        </p:spPr>
+        <p:txBody>
+          <a:bodyPr wrap="square" rtlCol="0" anchor="ctr"/>
+          <a:lstStyle/>
+          <a:p>
+            <a:pPr rtl="1" algn="r" indent="0" marL="0">
+              <a:buNone/>
+            </a:pPr>
+            <a:r>
+              <a:rPr lang="en-US" sz="3200" b="1" dirty="0">
+                <a:solidFill>
+                  <a:srgbClr val="DB2777"/>
+                </a:solidFill>
+                <a:latin typeface="Calibri" pitchFamily="34" charset="0"/>
+                <a:ea typeface="Calibri" pitchFamily="34" charset="-122"/>
+                <a:cs typeface="Calibri" pitchFamily="34" charset="-120"/>
+              </a:rPr>
+              <a:t>פרויקט נבחר: שם הפרויקט</a:t>
+            </a:r>
+            <a:endParaRPr lang="en-US" sz="3200" dirty="0"/>
+          </a:p>
+        </p:txBody>
+      </p:sp>
+      <p:sp>
+        <p:nvSpPr>
+          <p:cNvPr id="4" name="Text 1"/>
+          <p:cNvSpPr/>
+          <p:nvPr/>
+        </p:nvSpPr>
+        <p:spPr>
+          <a:xfrm>
+            <a:off x="6309360" y="1234440"/>
+            <a:ext cx="5239512" cy="365760"/>
+          </a:xfrm>
+          <a:prstGeom prst="rect">
+            <a:avLst/>
+          </a:prstGeom>
+          <a:noFill/>
+          <a:ln/>
+        </p:spPr>
+        <p:txBody>
+          <a:bodyPr wrap="square" rtlCol="0" anchor="t"/>
+          <a:lstStyle/>
+          <a:p>
+            <a:pPr rtl="1" algn="r" indent="0" marL="0">
+              <a:buNone/>
+            </a:pPr>
+            <a:r>
+              <a:rPr lang="en-US" sz="1200" dirty="0">
+                <a:solidFill>
+                  <a:srgbClr val="6B6B6B"/>
+                </a:solidFill>
+                <a:latin typeface="Calibri" pitchFamily="34" charset="0"/>
+                <a:ea typeface="Calibri" pitchFamily="34" charset="-122"/>
+                <a:cs typeface="Calibri" pitchFamily="34" charset="-120"/>
+              </a:rPr>
+              <a:t>לקוח: שם הלקוח · תחום: מיתוג ועיצוב · שנה: 2026</a:t>
+            </a:r>
+            <a:endParaRPr lang="en-US" sz="1200" dirty="0"/>
+          </a:p>
+        </p:txBody>
+      </p:sp>
+      <p:sp>
+        <p:nvSpPr>
+          <p:cNvPr id="5" name="Text 1"/>
+          <p:cNvSpPr/>
+          <p:nvPr/>
+        </p:nvSpPr>
+        <p:spPr>
+          <a:xfrm>
+            <a:off x="6309360" y="1828800"/>
+            <a:ext cx="5239512" cy="384048"/>
+          </a:xfrm>
+          <a:prstGeom prst="rect">
+            <a:avLst/>
+          </a:prstGeom>
+          <a:noFill/>
+          <a:ln/>
+        </p:spPr>
+        <p:txBody>
+          <a:bodyPr wrap="square" rtlCol="0" anchor="t"/>
+          <a:lstStyle/>
+          <a:p>
+            <a:pPr rtl="1" algn="r" indent="0" marL="0">
+              <a:buNone/>
+            </a:pPr>
+            <a:r>
+              <a:rPr lang="en-US" sz="1700" dirty="0" b="1">
+                <a:solidFill>
+                  <a:srgbClr val="DB2777"/>
+                </a:solidFill>
+                <a:latin typeface="Calibri" pitchFamily="34" charset="0"/>
+                <a:ea typeface="Calibri" pitchFamily="34" charset="-122"/>
+                <a:cs typeface="Calibri" pitchFamily="34" charset="-120"/>
+              </a:rPr>
+              <a:t>האתגר</a:t>
+            </a:r>
+            <a:endParaRPr lang="en-US" sz="1700" dirty="0"/>
+          </a:p>
+        </p:txBody>
+      </p:sp>
+      <p:sp>
+        <p:nvSpPr>
+          <p:cNvPr id="6" name="Text 1"/>
+          <p:cNvSpPr/>
+          <p:nvPr/>
+        </p:nvSpPr>
+        <p:spPr>
+          <a:xfrm>
+            <a:off x="6309360" y="2212848"/>
+            <a:ext cx="5239512" cy="731520"/>
+          </a:xfrm>
+          <a:prstGeom prst="rect">
+            <a:avLst/>
+          </a:prstGeom>
+          <a:noFill/>
+          <a:ln/>
+        </p:spPr>
+        <p:txBody>
+          <a:bodyPr wrap="square" rtlCol="0" anchor="t"/>
+          <a:lstStyle/>
+          <a:p>
+            <a:pPr rtl="1" algn="r" indent="0" marL="0">
+              <a:buNone/>
+            </a:pPr>
+            <a:r>
+              <a:rPr lang="en-US" sz="1400" dirty="0">
+                <a:solidFill>
+                  <a:srgbClr val="1A1A1A"/>
+                </a:solidFill>
+                <a:latin typeface="Calibri" pitchFamily="34" charset="0"/>
+                <a:ea typeface="Calibri" pitchFamily="34" charset="-122"/>
+                <a:cs typeface="Calibri" pitchFamily="34" charset="-120"/>
+              </a:rPr>
+              <a:t>מה הלקוח היה צריך, ומה הקשה על הפרויקט? משפט או שניים.</a:t>
+            </a:r>
+            <a:endParaRPr lang="en-US" sz="1400" dirty="0"/>
+          </a:p>
+        </p:txBody>
+      </p:sp>
+      <p:sp>
+        <p:nvSpPr>
+          <p:cNvPr id="7" name="Text 1"/>
+          <p:cNvSpPr/>
+          <p:nvPr/>
+        </p:nvSpPr>
+        <p:spPr>
+          <a:xfrm>
+            <a:off x="6309360" y="3108960"/>
+            <a:ext cx="5239512" cy="384048"/>
+          </a:xfrm>
+          <a:prstGeom prst="rect">
+            <a:avLst/>
+          </a:prstGeom>
+          <a:noFill/>
+          <a:ln/>
+        </p:spPr>
+        <p:txBody>
+          <a:bodyPr wrap="square" rtlCol="0" anchor="t"/>
+          <a:lstStyle/>
+          <a:p>
+            <a:pPr rtl="1" algn="r" indent="0" marL="0">
+              <a:buNone/>
+            </a:pPr>
+            <a:r>
+              <a:rPr lang="en-US" sz="1700" dirty="0" b="1">
+                <a:solidFill>
+                  <a:srgbClr val="DB2777"/>
+                </a:solidFill>
+                <a:latin typeface="Calibri" pitchFamily="34" charset="0"/>
+                <a:ea typeface="Calibri" pitchFamily="34" charset="-122"/>
+                <a:cs typeface="Calibri" pitchFamily="34" charset="-120"/>
+              </a:rPr>
+              <a:t>הפתרון</a:t>
+            </a:r>
+            <a:endParaRPr lang="en-US" sz="1700" dirty="0"/>
+          </a:p>
+        </p:txBody>
+      </p:sp>
+      <p:sp>
+        <p:nvSpPr>
+          <p:cNvPr id="8" name="Text 1"/>
+          <p:cNvSpPr/>
+          <p:nvPr/>
+        </p:nvSpPr>
+        <p:spPr>
+          <a:xfrm>
+            <a:off x="6309360" y="3493008"/>
+            <a:ext cx="5239512" cy="731520"/>
+          </a:xfrm>
+          <a:prstGeom prst="rect">
+            <a:avLst/>
+          </a:prstGeom>
+          <a:noFill/>
+          <a:ln/>
+        </p:spPr>
+        <p:txBody>
+          <a:bodyPr wrap="square" rtlCol="0" anchor="t"/>
+          <a:lstStyle/>
+          <a:p>
+            <a:pPr rtl="1" algn="r" indent="0" marL="0">
+              <a:buNone/>
+            </a:pPr>
+            <a:r>
+              <a:rPr lang="en-US" sz="1400" dirty="0">
+                <a:solidFill>
+                  <a:srgbClr val="1A1A1A"/>
+                </a:solidFill>
+                <a:latin typeface="Calibri" pitchFamily="34" charset="0"/>
+                <a:ea typeface="Calibri" pitchFamily="34" charset="-122"/>
+                <a:cs typeface="Calibri" pitchFamily="34" charset="-120"/>
+              </a:rPr>
+              <a:t>מה עשיתם ואיך — הרעיון המרכזי, הסגנון והכלים שבחרתם.</a:t>
+            </a:r>
+            <a:endParaRPr lang="en-US" sz="1400" dirty="0"/>
+          </a:p>
+        </p:txBody>
+      </p:sp>
+      <p:sp>
+        <p:nvSpPr>
+          <p:cNvPr id="9" name="Text 1"/>
+          <p:cNvSpPr/>
+          <p:nvPr/>
+        </p:nvSpPr>
+        <p:spPr>
+          <a:xfrm>
+            <a:off x="6309360" y="4389120"/>
+            <a:ext cx="5239512" cy="384048"/>
+          </a:xfrm>
+          <a:prstGeom prst="rect">
+            <a:avLst/>
+          </a:prstGeom>
+          <a:noFill/>
+          <a:ln/>
+        </p:spPr>
+        <p:txBody>
+          <a:bodyPr wrap="square" rtlCol="0" anchor="t"/>
+          <a:lstStyle/>
+          <a:p>
+            <a:pPr rtl="1" algn="r" indent="0" marL="0">
+              <a:buNone/>
+            </a:pPr>
+            <a:r>
+              <a:rPr lang="en-US" sz="1700" dirty="0" b="1">
+                <a:solidFill>
+                  <a:srgbClr val="DB2777"/>
+                </a:solidFill>
+                <a:latin typeface="Calibri" pitchFamily="34" charset="0"/>
+                <a:ea typeface="Calibri" pitchFamily="34" charset="-122"/>
+                <a:cs typeface="Calibri" pitchFamily="34" charset="-120"/>
+              </a:rPr>
+              <a:t>התוצאה</a:t>
+            </a:r>
+            <a:endParaRPr lang="en-US" sz="1700" dirty="0"/>
+          </a:p>
+        </p:txBody>
+      </p:sp>
+      <p:sp>
+        <p:nvSpPr>
+          <p:cNvPr id="10" name="Text 1"/>
+          <p:cNvSpPr/>
+          <p:nvPr/>
+        </p:nvSpPr>
+        <p:spPr>
+          <a:xfrm>
+            <a:off x="6309360" y="4773168"/>
+            <a:ext cx="5239512" cy="731520"/>
+          </a:xfrm>
+          <a:prstGeom prst="rect">
+            <a:avLst/>
+          </a:prstGeom>
+          <a:noFill/>
+          <a:ln/>
+        </p:spPr>
+        <p:txBody>
+          <a:bodyPr wrap="square" rtlCol="0" anchor="t"/>
+          <a:lstStyle/>
+          <a:p>
+            <a:pPr rtl="1" algn="r" indent="0" marL="0">
+              <a:buNone/>
+            </a:pPr>
+            <a:r>
+              <a:rPr lang="en-US" sz="1400" dirty="0">
+                <a:solidFill>
+                  <a:srgbClr val="1A1A1A"/>
+                </a:solidFill>
+                <a:latin typeface="Calibri" pitchFamily="34" charset="0"/>
+                <a:ea typeface="Calibri" pitchFamily="34" charset="-122"/>
+                <a:cs typeface="Calibri" pitchFamily="34" charset="-120"/>
+              </a:rPr>
+              <a:t>מה השתנה בזכות העבודה? מספרים, משוב מהלקוח או פרסים.</a:t>
+            </a:r>
+            <a:endParaRPr lang="en-US" sz="1400" dirty="0"/>
+          </a:p>
+        </p:txBody>
+      </p:sp>
+      <p:sp>
+        <p:nvSpPr>
+          <p:cNvPr id="11" name="Shape 2"/>
+          <p:cNvSpPr/>
+          <p:nvPr/>
+        </p:nvSpPr>
+        <p:spPr>
+          <a:xfrm>
+            <a:off x="640080" y="1463040"/>
+            <a:ext cx="5394960" cy="4206240"/>
+          </a:xfrm>
+          <a:prstGeom prst="roundRect">
+            <a:avLst>
+              <a:gd name="adj" fmla="val 1778"/>
+            </a:avLst>
+          </a:prstGeom>
+          <a:solidFill>
+            <a:srgbClr val="F5E6EE"/>
+          </a:solidFill>
+          <a:ln/>
+        </p:spPr>
+      </p:sp>
+      <p:pic>
+        <p:nvPicPr>
+          <p:cNvPr id="12" name="Image 0" descr="preencoded.png">    </p:cNvPr>
+          <p:cNvPicPr>
+            <a:picLocks noChangeAspect="1"/>
+          </p:cNvPicPr>
+          <p:nvPr/>
+        </p:nvPicPr>
+        <p:blipFill>
+          <a:blip r:embed="rId2"/>
+          <a:stretch>
+            <a:fillRect/>
+          </a:stretch>
+        </p:blipFill>
+        <p:spPr>
+          <a:xfrm>
+            <a:off x="2880360" y="2926080"/>
+            <a:ext cx="914400" cy="914400"/>
+          </a:xfrm>
+          <a:prstGeom prst="rect">
+            <a:avLst/>
+          </a:prstGeom>
+        </p:spPr>
+      </p:pic>
+      <p:sp>
+        <p:nvSpPr>
+          <p:cNvPr id="13" name="Text 1"/>
+          <p:cNvSpPr/>
+          <p:nvPr/>
+        </p:nvSpPr>
+        <p:spPr>
+          <a:xfrm>
+            <a:off x="640080" y="3977639"/>
+            <a:ext cx="5394960" cy="457200"/>
+          </a:xfrm>
+          <a:prstGeom prst="rect">
+            <a:avLst/>
+          </a:prstGeom>
+          <a:noFill/>
+          <a:ln/>
+        </p:spPr>
+        <p:txBody>
+          <a:bodyPr wrap="square" rtlCol="0" anchor="t"/>
+          <a:lstStyle/>
+          <a:p>
+            <a:pPr rtl="1" algn="ctr" indent="0" marL="0">
+              <a:buNone/>
+            </a:pPr>
+            <a:r>
+              <a:rPr lang="en-US" sz="1300" dirty="0">
+                <a:solidFill>
+                  <a:srgbClr val="DB2777"/>
+                </a:solidFill>
+                <a:latin typeface="Calibri" pitchFamily="34" charset="0"/>
+                <a:ea typeface="Calibri" pitchFamily="34" charset="-122"/>
+                <a:cs typeface="Calibri" pitchFamily="34" charset="-120"/>
+              </a:rPr>
+              <a:t>כאן מקום לתמונה מהפרויקט</a:t>
             </a:r>
             <a:endParaRPr lang="en-US" sz="1300" dirty="0"/>
           </a:p>
